--- a/curriculum-planner/output/slides/session_03_slides.pptx
+++ b/curriculum-planner/output/slides/session_03_slides.pptx
@@ -26,11 +26,6 @@
     <p:sldId id="274" r:id="rId25"/>
     <p:sldId id="275" r:id="rId26"/>
     <p:sldId id="276" r:id="rId27"/>
-    <p:sldId id="277" r:id="rId28"/>
-    <p:sldId id="278" r:id="rId29"/>
-    <p:sldId id="279" r:id="rId30"/>
-    <p:sldId id="280" r:id="rId31"/>
-    <p:sldId id="281" r:id="rId32"/>
   </p:sldIdLst>
   <p:sldSz cx="12191695" cy="6858000" type="screen4x3"/>
   <p:notesSz cx="6858000" cy="9144000"/>
@@ -3185,7 +3180,7 @@
           <a:lstStyle/>
           <a:p>
             <a:r>
-              <a:t>Activity: Break</a:t>
+              <a:t>Activity: Lunch</a:t>
             </a:r>
           </a:p>
         </p:txBody>
@@ -3206,7 +3201,7 @@
           <a:lstStyle/>
           <a:p>
             <a:r>
-              <a:t>Duration: 15 min</a:t>
+              <a:t>Duration: 55 min</a:t>
             </a:r>
           </a:p>
           <a:p>
@@ -3250,7 +3245,7 @@
           <a:lstStyle/>
           <a:p>
             <a:r>
-              <a:t>Activity: KPI Workshop</a:t>
+              <a:t>Activity: Presentation Autopsy</a:t>
             </a:r>
           </a:p>
         </p:txBody>
@@ -3271,7 +3266,7 @@
           <a:lstStyle/>
           <a:p>
             <a:r>
-              <a:t>Duration: 30 min</a:t>
+              <a:t>Duration: 25 min</a:t>
             </a:r>
           </a:p>
           <a:p>
@@ -3282,25 +3277,13 @@
           <a:p>
             <a:pPr lvl="1"/>
             <a:r>
-              <a:t>Delivery: Vanity metrics vs</a:t>
-            </a:r>
-          </a:p>
-          <a:p>
-            <a:pPr lvl="1"/>
-            <a:r>
-              <a:t>actionable metrics</a:t>
-            </a:r>
-          </a:p>
-          <a:p>
-            <a:pPr lvl="1"/>
-            <a:r>
-              <a:t>A good KPI: specific, measurable, matters…</a:t>
-            </a:r>
-          </a:p>
-          <a:p>
-            <a:pPr lvl="1"/>
-            <a:r>
-              <a:t>Students define 3 KPIs for a…</a:t>
+              <a:t>Delivery: Group analyzes Round 1</a:t>
+            </a:r>
+          </a:p>
+          <a:p>
+            <a:pPr lvl="1"/>
+            <a:r>
+              <a:t>Common mistakes: too much data, not…</a:t>
             </a:r>
           </a:p>
         </p:txBody>
@@ -3339,7 +3322,7 @@
           <a:lstStyle/>
           <a:p>
             <a:r>
-              <a:t>Activity: Mock Stakeholder Panel — Round 1  |✆</a:t>
+              <a:t>Activity: Mock Stakeholder Panel — Round 2</a:t>
             </a:r>
           </a:p>
         </p:txBody>
@@ -3360,7 +3343,7 @@
           <a:lstStyle/>
           <a:p>
             <a:r>
-              <a:t>Duration: 30 min</a:t>
+              <a:t>Duration: 40 min</a:t>
             </a:r>
           </a:p>
           <a:p>
@@ -3371,19 +3354,31 @@
           <a:p>
             <a:pPr lvl="1"/>
             <a:r>
-              <a:t>Format: Presentations + adversarial Q&amp;A</a:t>
-            </a:r>
-          </a:p>
-          <a:p>
-            <a:pPr lvl="1"/>
-            <a:r>
-              <a:t>Bloom’s: Create + Evaluate Delivery: 2-minute…</a:t>
-            </a:r>
-          </a:p>
-          <a:p>
-            <a:pPr lvl="1"/>
-            <a:r>
-              <a:t>Panel challenges: “Where did you get…</a:t>
+              <a:t>Format: Same format</a:t>
+            </a:r>
+          </a:p>
+          <a:p>
+            <a:pPr lvl="1"/>
+            <a:r>
+              <a:t>Remaining 9–10 students</a:t>
+            </a:r>
+          </a:p>
+          <a:p>
+            <a:pPr lvl="1"/>
+            <a:r>
+              <a:t>Bloom’s: Create + Evaluate Delivery: Same…</a:t>
+            </a:r>
+          </a:p>
+          <a:p>
+            <a:pPr lvl="1"/>
+            <a:r>
+              <a:t>Every student has now presented and…</a:t>
+            </a:r>
+          </a:p>
+          <a:p>
+            <a:pPr lvl="1"/>
+            <a:r>
+              <a:t>Round 2 benefits from the Presentation…</a:t>
             </a:r>
           </a:p>
         </p:txBody>
@@ -3422,7 +3417,7 @@
           <a:lstStyle/>
           <a:p>
             <a:r>
-              <a:t>Activity: Pacing: 8–9 students × 3.pitch +Q&amp;A + 30 sec transition) = 28–31..</a:t>
+              <a:t>Activity: Break</a:t>
             </a:r>
           </a:p>
         </p:txBody>
@@ -3443,7 +3438,7 @@
           <a:lstStyle/>
           <a:p>
             <a:r>
-              <a:t>Duration: 5 min</a:t>
+              <a:t>Duration: 15 min</a:t>
             </a:r>
           </a:p>
           <a:p>
@@ -3487,7 +3482,7 @@
           <a:lstStyle/>
           <a:p>
             <a:r>
-              <a:t>Activity: Lunch</a:t>
+              <a:t>Activity: SQL Taster</a:t>
             </a:r>
           </a:p>
         </p:txBody>
@@ -3508,12 +3503,42 @@
           <a:lstStyle/>
           <a:p>
             <a:r>
-              <a:t>Duration: 55 min</a:t>
+              <a:t>Duration: 30 min</a:t>
             </a:r>
           </a:p>
           <a:p>
             <a:r>
               <a:t>Format: Whole Class</a:t>
+            </a:r>
+          </a:p>
+          <a:p>
+            <a:pPr lvl="1"/>
+            <a:r>
+              <a:t>Delivery: 30 minutes in a browser-based…</a:t>
+            </a:r>
+          </a:p>
+          <a:p>
+            <a:pPr lvl="1"/>
+            <a:r>
+              <a:t>Not proficiency—demystification</a:t>
+            </a:r>
+          </a:p>
+          <a:p>
+            <a:pPr lvl="1"/>
+            <a:r>
+              <a:t>Students run 3 basic queries: SELECT,…</a:t>
+            </a:r>
+          </a:p>
+          <a:p>
+            <a:pPr lvl="1"/>
+            <a:r>
+              <a:t>They now understand what SQL does,…</a:t>
+            </a:r>
+          </a:p>
+          <a:p>
+            <a:pPr lvl="1"/>
+            <a:r>
+              <a:t>They can communicate with technical colleagues…</a:t>
             </a:r>
           </a:p>
         </p:txBody>
@@ -3552,7 +3577,7 @@
           <a:lstStyle/>
           <a:p>
             <a:r>
-              <a:t>Activity: Presentation Autopsy</a:t>
+              <a:t>Activity: EU/International Reporting Frameworks</a:t>
             </a:r>
           </a:p>
         </p:txBody>
@@ -3573,7 +3598,7 @@
           <a:lstStyle/>
           <a:p>
             <a:r>
-              <a:t>Duration: 25 min</a:t>
+              <a:t>Duration: 30 min</a:t>
             </a:r>
           </a:p>
           <a:p>
@@ -3584,13 +3609,31 @@
           <a:p>
             <a:pPr lvl="1"/>
             <a:r>
-              <a:t>Delivery: Group analyzes Round 1</a:t>
-            </a:r>
-          </a:p>
-          <a:p>
-            <a:pPr lvl="1"/>
-            <a:r>
-              <a:t>Common mistakes: too much data, not…</a:t>
+              <a:t>Delivery: How EU-funded projects report impact…</a:t>
+            </a:r>
+          </a:p>
+          <a:p>
+            <a:pPr lvl="1"/>
+            <a:r>
+              <a:t>Logical framework matrix</a:t>
+            </a:r>
+          </a:p>
+          <a:p>
+            <a:pPr lvl="1"/>
+            <a:r>
+              <a:t>Writing SMART indicators that international evaluators…</a:t>
+            </a:r>
+          </a:p>
+          <a:p>
+            <a:pPr lvl="1"/>
+            <a:r>
+              <a:t>Students write 3 indicators for a…</a:t>
+            </a:r>
+          </a:p>
+          <a:p>
+            <a:pPr lvl="1"/>
+            <a:r>
+              <a:t>Differentiator no other data bootcamp offers</a:t>
             </a:r>
           </a:p>
         </p:txBody>
@@ -3629,7 +3672,7 @@
           <a:lstStyle/>
           <a:p>
             <a:r>
-              <a:t>Activity: Mock Stakeholder Panel — Round 2</a:t>
+              <a:t>Activity: AI + Data Literacy</a:t>
             </a:r>
           </a:p>
         </p:txBody>
@@ -3650,7 +3693,7 @@
           <a:lstStyle/>
           <a:p>
             <a:r>
-              <a:t>Duration: 40 min</a:t>
+              <a:t>Duration: 25 min</a:t>
             </a:r>
           </a:p>
           <a:p>
@@ -3661,31 +3704,31 @@
           <a:p>
             <a:pPr lvl="1"/>
             <a:r>
-              <a:t>Format: Same format</a:t>
-            </a:r>
-          </a:p>
-          <a:p>
-            <a:pPr lvl="1"/>
-            <a:r>
-              <a:t>Remaining 9–10 students</a:t>
-            </a:r>
-          </a:p>
-          <a:p>
-            <a:pPr lvl="1"/>
-            <a:r>
-              <a:t>Bloom’s: Create + Evaluate Delivery: Same…</a:t>
-            </a:r>
-          </a:p>
-          <a:p>
-            <a:pPr lvl="1"/>
-            <a:r>
-              <a:t>Every student has now presented and…</a:t>
-            </a:r>
-          </a:p>
-          <a:p>
-            <a:pPr lvl="1"/>
-            <a:r>
-              <a:t>Round 2 benefits from the Presentation…</a:t>
+              <a:t>Delivery: How AI changes what “data…</a:t>
+            </a:r>
+          </a:p>
+          <a:p>
+            <a:pPr lvl="1"/>
+            <a:r>
+              <a:t>Students who can prompt AI to…</a:t>
+            </a:r>
+          </a:p>
+          <a:p>
+            <a:pPr lvl="1"/>
+            <a:r>
+              <a:t>Quick exercise: same dataset, AI analysis…</a:t>
+            </a:r>
+          </a:p>
+          <a:p>
+            <a:pPr lvl="1"/>
+            <a:r>
+              <a:t>manual</a:t>
+            </a:r>
+          </a:p>
+          <a:p>
+            <a:pPr lvl="1"/>
+            <a:r>
+              <a:t>Where do they diverge?</a:t>
             </a:r>
           </a:p>
         </p:txBody>
@@ -3724,7 +3767,7 @@
           <a:lstStyle/>
           <a:p>
             <a:r>
-              <a:t>Activity: Pacing: 9–10 students × 3.= 31.5–. Buffer = 5–.</a:t>
+              <a:t>Activity: Capstone Kickoff</a:t>
             </a:r>
           </a:p>
         </p:txBody>
@@ -3745,12 +3788,30 @@
           <a:lstStyle/>
           <a:p>
             <a:r>
-              <a:t>Duration: 5 min</a:t>
+              <a:t>Duration: 30 min</a:t>
             </a:r>
           </a:p>
           <a:p>
             <a:r>
               <a:t>Format: Whole Class</a:t>
+            </a:r>
+          </a:p>
+          <a:p>
+            <a:pPr lvl="1"/>
+            <a:r>
+              <a:t>Delivery: Present 4 capstone options</a:t>
+            </a:r>
+          </a:p>
+          <a:p>
+            <a:pPr lvl="1"/>
+            <a:r>
+              <a:t>Students choose, form teams of 2–3…</a:t>
+            </a:r>
+          </a:p>
+          <a:p>
+            <a:pPr lvl="1"/>
+            <a:r>
+              <a:t>Provide a capstone planning template</a:t>
             </a:r>
           </a:p>
         </p:txBody>
@@ -3789,7 +3850,7 @@
           <a:lstStyle/>
           <a:p>
             <a:r>
-              <a:t>Activity: Break</a:t>
+              <a:t>Activity: Revised Dashboard Sprint  |✆</a:t>
             </a:r>
           </a:p>
         </p:txBody>
@@ -3816,6 +3877,24 @@
           <a:p>
             <a:r>
               <a:t>Format: Whole Class</a:t>
+            </a:r>
+          </a:p>
+          <a:p>
+            <a:pPr lvl="1"/>
+            <a:r>
+              <a:t>TIMING ADJUSTMENT: Reduced from 20 to…</a:t>
+            </a:r>
+          </a:p>
+          <a:p>
+            <a:pPr lvl="1"/>
+            <a:r>
+              <a:t>15 min is sufficient for focused…</a:t>
+            </a:r>
+          </a:p>
+          <a:p>
+            <a:pPr lvl="1"/>
+            <a:r>
+              <a:t>Students know Looker Studio well by…</a:t>
             </a:r>
           </a:p>
         </p:txBody>
@@ -3854,7 +3933,7 @@
           <a:lstStyle/>
           <a:p>
             <a:r>
-              <a:t>Activity: SQL Taster</a:t>
+              <a:t>Activity: Day 3 Wrap  |✆</a:t>
             </a:r>
           </a:p>
         </p:txBody>
@@ -3875,42 +3954,12 @@
           <a:lstStyle/>
           <a:p>
             <a:r>
-              <a:t>Duration: 30 min</a:t>
+              <a:t>Duration: 15 min</a:t>
             </a:r>
           </a:p>
           <a:p>
             <a:r>
               <a:t>Format: Whole Class</a:t>
-            </a:r>
-          </a:p>
-          <a:p>
-            <a:pPr lvl="1"/>
-            <a:r>
-              <a:t>Delivery: 30 minutes in a browser-based…</a:t>
-            </a:r>
-          </a:p>
-          <a:p>
-            <a:pPr lvl="1"/>
-            <a:r>
-              <a:t>Not proficiency—demystification</a:t>
-            </a:r>
-          </a:p>
-          <a:p>
-            <a:pPr lvl="1"/>
-            <a:r>
-              <a:t>Students run 3 basic queries: SELECT,…</a:t>
-            </a:r>
-          </a:p>
-          <a:p>
-            <a:pPr lvl="1"/>
-            <a:r>
-              <a:t>They now understand what SQL does,…</a:t>
-            </a:r>
-          </a:p>
-          <a:p>
-            <a:pPr lvl="1"/>
-            <a:r>
-              <a:t>They can communicate with technical colleagues…</a:t>
             </a:r>
           </a:p>
         </p:txBody>
@@ -3970,37 +4019,37 @@
           <a:lstStyle/>
           <a:p>
             <a:r>
-              <a:t>SWBAT: Session 3 Contribution</a:t>
+              <a:t>SWBAT: Add context to data using…</a:t>
             </a:r>
           </a:p>
           <a:p>
             <a:pPr/>
             <a:r>
-              <a:t>SWBAT: By the end of Session…</a:t>
+              <a:t>SWBAT: Build a 6-month forecast using…</a:t>
             </a:r>
           </a:p>
           <a:p>
             <a:pPr/>
             <a:r>
-              <a:t>SWBAT: Add context to data using…</a:t>
+              <a:t>SWBAT: Define actionable KPIs that distinguish…</a:t>
             </a:r>
           </a:p>
           <a:p>
             <a:pPr/>
             <a:r>
-              <a:t>SWBAT: Build a 6-month forecast using…</a:t>
+              <a:t>SWBAT: Present data findings under adversarial…</a:t>
             </a:r>
           </a:p>
           <a:p>
             <a:pPr/>
             <a:r>
-              <a:t>SWBAT: Define actionable KPIs that distinguish…</a:t>
+              <a:t>SWBAT: Read and write basic SQL…</a:t>
             </a:r>
           </a:p>
           <a:p>
             <a:pPr/>
             <a:r>
-              <a:t>SWBAT: Present data findings under adversarial…</a:t>
+              <a:t>SWBAT: Write SMART indicators for EU-style…</a:t>
             </a:r>
           </a:p>
         </p:txBody>
@@ -4039,7 +4088,7 @@
           <a:lstStyle/>
           <a:p>
             <a:r>
-              <a:t>Activity: EU/International Reporting Frameworks</a:t>
+              <a:t>Check for Understanding</a:t>
             </a:r>
           </a:p>
         </p:txBody>
@@ -4060,42 +4109,12 @@
           <a:lstStyle/>
           <a:p>
             <a:r>
-              <a:t>Duration: 30 min</a:t>
-            </a:r>
-          </a:p>
-          <a:p>
-            <a:r>
-              <a:t>Format: Whole Class</a:t>
-            </a:r>
-          </a:p>
-          <a:p>
-            <a:pPr lvl="1"/>
-            <a:r>
-              <a:t>Delivery: How EU-funded projects report impact…</a:t>
-            </a:r>
-          </a:p>
-          <a:p>
-            <a:pPr lvl="1"/>
-            <a:r>
-              <a:t>Logical framework matrix</a:t>
-            </a:r>
-          </a:p>
-          <a:p>
-            <a:pPr lvl="1"/>
-            <a:r>
-              <a:t>Writing SMART indicators that international evaluators…</a:t>
-            </a:r>
-          </a:p>
-          <a:p>
-            <a:pPr lvl="1"/>
-            <a:r>
-              <a:t>Students write 3 indicators for a…</a:t>
-            </a:r>
-          </a:p>
-          <a:p>
-            <a:pPr lvl="1"/>
-            <a:r>
-              <a:t>Differentiator no other data bootcamp offers</a:t>
+              <a:t>Technique: Think-Pair-Share</a:t>
+            </a:r>
+          </a:p>
+          <a:p>
+            <a:r>
+              <a:t>Can you demonstrate: Add context to data using benchmarking, trending, and segmentation (LO #4)?</a:t>
             </a:r>
           </a:p>
         </p:txBody>
@@ -4134,397 +4153,6 @@
           <a:lstStyle/>
           <a:p>
             <a:r>
-              <a:t>Activity: AI + Data Literacy</a:t>
-            </a:r>
-          </a:p>
-        </p:txBody>
-      </p:sp>
-      <p:sp>
-        <p:nvSpPr>
-          <p:cNvPr id="3" name="Content Placeholder 2"/>
-          <p:cNvSpPr>
-            <a:spLocks noGrp="1"/>
-          </p:cNvSpPr>
-          <p:nvPr>
-            <p:ph idx="1"/>
-          </p:nvPr>
-        </p:nvSpPr>
-        <p:spPr/>
-        <p:txBody>
-          <a:bodyPr/>
-          <a:lstStyle/>
-          <a:p>
-            <a:r>
-              <a:t>Duration: 25 min</a:t>
-            </a:r>
-          </a:p>
-          <a:p>
-            <a:r>
-              <a:t>Format: Whole Class</a:t>
-            </a:r>
-          </a:p>
-          <a:p>
-            <a:pPr lvl="1"/>
-            <a:r>
-              <a:t>Delivery: How AI changes what “data…</a:t>
-            </a:r>
-          </a:p>
-          <a:p>
-            <a:pPr lvl="1"/>
-            <a:r>
-              <a:t>Students who can prompt AI to…</a:t>
-            </a:r>
-          </a:p>
-          <a:p>
-            <a:pPr lvl="1"/>
-            <a:r>
-              <a:t>Quick exercise: same dataset, AI analysis…</a:t>
-            </a:r>
-          </a:p>
-          <a:p>
-            <a:pPr lvl="1"/>
-            <a:r>
-              <a:t>manual</a:t>
-            </a:r>
-          </a:p>
-          <a:p>
-            <a:pPr lvl="1"/>
-            <a:r>
-              <a:t>Where do they diverge?</a:t>
-            </a:r>
-          </a:p>
-        </p:txBody>
-      </p:sp>
-    </p:spTree>
-  </p:cSld>
-  <p:clrMapOvr>
-    <a:masterClrMapping/>
-  </p:clrMapOvr>
-</p:sld>
-</file>
-
-<file path=ppt/slides/slide22.xml><?xml version="1.0" encoding="utf-8"?>
-<p:sld xmlns:a="http://schemas.openxmlformats.org/drawingml/2006/main" xmlns:p="http://schemas.openxmlformats.org/presentationml/2006/main" xmlns:r="http://schemas.openxmlformats.org/officeDocument/2006/relationships">
-  <p:cSld>
-    <p:spTree>
-      <p:nvGrpSpPr>
-        <p:cNvPr id="1" name=""/>
-        <p:cNvGrpSpPr/>
-        <p:nvPr/>
-      </p:nvGrpSpPr>
-      <p:grpSpPr/>
-      <p:sp>
-        <p:nvSpPr>
-          <p:cNvPr id="2" name="Title 1"/>
-          <p:cNvSpPr>
-            <a:spLocks noGrp="1"/>
-          </p:cNvSpPr>
-          <p:nvPr>
-            <p:ph type="title"/>
-          </p:nvPr>
-        </p:nvSpPr>
-        <p:spPr/>
-        <p:txBody>
-          <a:bodyPr/>
-          <a:lstStyle/>
-          <a:p>
-            <a:r>
-              <a:t>Activity: Capstone Kickoff</a:t>
-            </a:r>
-          </a:p>
-        </p:txBody>
-      </p:sp>
-      <p:sp>
-        <p:nvSpPr>
-          <p:cNvPr id="3" name="Content Placeholder 2"/>
-          <p:cNvSpPr>
-            <a:spLocks noGrp="1"/>
-          </p:cNvSpPr>
-          <p:nvPr>
-            <p:ph idx="1"/>
-          </p:nvPr>
-        </p:nvSpPr>
-        <p:spPr/>
-        <p:txBody>
-          <a:bodyPr/>
-          <a:lstStyle/>
-          <a:p>
-            <a:r>
-              <a:t>Duration: 30 min</a:t>
-            </a:r>
-          </a:p>
-          <a:p>
-            <a:r>
-              <a:t>Format: Whole Class</a:t>
-            </a:r>
-          </a:p>
-          <a:p>
-            <a:pPr lvl="1"/>
-            <a:r>
-              <a:t>Delivery: Present 4 capstone options</a:t>
-            </a:r>
-          </a:p>
-          <a:p>
-            <a:pPr lvl="1"/>
-            <a:r>
-              <a:t>Students choose, form teams of 2–3…</a:t>
-            </a:r>
-          </a:p>
-          <a:p>
-            <a:pPr lvl="1"/>
-            <a:r>
-              <a:t>Provide a capstone planning template</a:t>
-            </a:r>
-          </a:p>
-        </p:txBody>
-      </p:sp>
-    </p:spTree>
-  </p:cSld>
-  <p:clrMapOvr>
-    <a:masterClrMapping/>
-  </p:clrMapOvr>
-</p:sld>
-</file>
-
-<file path=ppt/slides/slide23.xml><?xml version="1.0" encoding="utf-8"?>
-<p:sld xmlns:a="http://schemas.openxmlformats.org/drawingml/2006/main" xmlns:p="http://schemas.openxmlformats.org/presentationml/2006/main" xmlns:r="http://schemas.openxmlformats.org/officeDocument/2006/relationships">
-  <p:cSld>
-    <p:spTree>
-      <p:nvGrpSpPr>
-        <p:cNvPr id="1" name=""/>
-        <p:cNvGrpSpPr/>
-        <p:nvPr/>
-      </p:nvGrpSpPr>
-      <p:grpSpPr/>
-      <p:sp>
-        <p:nvSpPr>
-          <p:cNvPr id="2" name="Title 1"/>
-          <p:cNvSpPr>
-            <a:spLocks noGrp="1"/>
-          </p:cNvSpPr>
-          <p:nvPr>
-            <p:ph type="title"/>
-          </p:nvPr>
-        </p:nvSpPr>
-        <p:spPr/>
-        <p:txBody>
-          <a:bodyPr/>
-          <a:lstStyle/>
-          <a:p>
-            <a:r>
-              <a:t>Activity: Revised Dashboard Sprint  |✆</a:t>
-            </a:r>
-          </a:p>
-        </p:txBody>
-      </p:sp>
-      <p:sp>
-        <p:nvSpPr>
-          <p:cNvPr id="3" name="Content Placeholder 2"/>
-          <p:cNvSpPr>
-            <a:spLocks noGrp="1"/>
-          </p:cNvSpPr>
-          <p:nvPr>
-            <p:ph idx="1"/>
-          </p:nvPr>
-        </p:nvSpPr>
-        <p:spPr/>
-        <p:txBody>
-          <a:bodyPr/>
-          <a:lstStyle/>
-          <a:p>
-            <a:r>
-              <a:t>Duration: 15 min</a:t>
-            </a:r>
-          </a:p>
-          <a:p>
-            <a:r>
-              <a:t>Format: Whole Class</a:t>
-            </a:r>
-          </a:p>
-          <a:p>
-            <a:pPr lvl="1"/>
-            <a:r>
-              <a:t>TIMING ADJUSTMENT: Reduced from 20 to…</a:t>
-            </a:r>
-          </a:p>
-          <a:p>
-            <a:pPr lvl="1"/>
-            <a:r>
-              <a:t>15 min is sufficient for focused…</a:t>
-            </a:r>
-          </a:p>
-          <a:p>
-            <a:pPr lvl="1"/>
-            <a:r>
-              <a:t>Students know Looker Studio well by…</a:t>
-            </a:r>
-          </a:p>
-        </p:txBody>
-      </p:sp>
-    </p:spTree>
-  </p:cSld>
-  <p:clrMapOvr>
-    <a:masterClrMapping/>
-  </p:clrMapOvr>
-</p:sld>
-</file>
-
-<file path=ppt/slides/slide24.xml><?xml version="1.0" encoding="utf-8"?>
-<p:sld xmlns:a="http://schemas.openxmlformats.org/drawingml/2006/main" xmlns:p="http://schemas.openxmlformats.org/presentationml/2006/main" xmlns:r="http://schemas.openxmlformats.org/officeDocument/2006/relationships">
-  <p:cSld>
-    <p:spTree>
-      <p:nvGrpSpPr>
-        <p:cNvPr id="1" name=""/>
-        <p:cNvGrpSpPr/>
-        <p:nvPr/>
-      </p:nvGrpSpPr>
-      <p:grpSpPr/>
-      <p:sp>
-        <p:nvSpPr>
-          <p:cNvPr id="2" name="Title 1"/>
-          <p:cNvSpPr>
-            <a:spLocks noGrp="1"/>
-          </p:cNvSpPr>
-          <p:nvPr>
-            <p:ph type="title"/>
-          </p:nvPr>
-        </p:nvSpPr>
-        <p:spPr/>
-        <p:txBody>
-          <a:bodyPr/>
-          <a:lstStyle/>
-          <a:p>
-            <a:r>
-              <a:t>Activity: Day 3 Wrap  |✆</a:t>
-            </a:r>
-          </a:p>
-        </p:txBody>
-      </p:sp>
-      <p:sp>
-        <p:nvSpPr>
-          <p:cNvPr id="3" name="Content Placeholder 2"/>
-          <p:cNvSpPr>
-            <a:spLocks noGrp="1"/>
-          </p:cNvSpPr>
-          <p:nvPr>
-            <p:ph idx="1"/>
-          </p:nvPr>
-        </p:nvSpPr>
-        <p:spPr/>
-        <p:txBody>
-          <a:bodyPr/>
-          <a:lstStyle/>
-          <a:p>
-            <a:r>
-              <a:t>Duration: 15 min</a:t>
-            </a:r>
-          </a:p>
-          <a:p>
-            <a:r>
-              <a:t>Format: Whole Class</a:t>
-            </a:r>
-          </a:p>
-        </p:txBody>
-      </p:sp>
-    </p:spTree>
-  </p:cSld>
-  <p:clrMapOvr>
-    <a:masterClrMapping/>
-  </p:clrMapOvr>
-</p:sld>
-</file>
-
-<file path=ppt/slides/slide25.xml><?xml version="1.0" encoding="utf-8"?>
-<p:sld xmlns:a="http://schemas.openxmlformats.org/drawingml/2006/main" xmlns:p="http://schemas.openxmlformats.org/presentationml/2006/main" xmlns:r="http://schemas.openxmlformats.org/officeDocument/2006/relationships">
-  <p:cSld>
-    <p:spTree>
-      <p:nvGrpSpPr>
-        <p:cNvPr id="1" name=""/>
-        <p:cNvGrpSpPr/>
-        <p:nvPr/>
-      </p:nvGrpSpPr>
-      <p:grpSpPr/>
-      <p:sp>
-        <p:nvSpPr>
-          <p:cNvPr id="2" name="Title 1"/>
-          <p:cNvSpPr>
-            <a:spLocks noGrp="1"/>
-          </p:cNvSpPr>
-          <p:nvPr>
-            <p:ph type="title"/>
-          </p:nvPr>
-        </p:nvSpPr>
-        <p:spPr/>
-        <p:txBody>
-          <a:bodyPr/>
-          <a:lstStyle/>
-          <a:p>
-            <a:r>
-              <a:t>Check for Understanding</a:t>
-            </a:r>
-          </a:p>
-        </p:txBody>
-      </p:sp>
-      <p:sp>
-        <p:nvSpPr>
-          <p:cNvPr id="3" name="Content Placeholder 2"/>
-          <p:cNvSpPr>
-            <a:spLocks noGrp="1"/>
-          </p:cNvSpPr>
-          <p:nvPr>
-            <p:ph idx="1"/>
-          </p:nvPr>
-        </p:nvSpPr>
-        <p:spPr/>
-        <p:txBody>
-          <a:bodyPr/>
-          <a:lstStyle/>
-          <a:p>
-            <a:r>
-              <a:t>Technique: Think-Pair-Share</a:t>
-            </a:r>
-          </a:p>
-          <a:p>
-            <a:r>
-              <a:t>Can you demonstrate: Session 3 Contribution?</a:t>
-            </a:r>
-          </a:p>
-        </p:txBody>
-      </p:sp>
-    </p:spTree>
-  </p:cSld>
-  <p:clrMapOvr>
-    <a:masterClrMapping/>
-  </p:clrMapOvr>
-</p:sld>
-</file>
-
-<file path=ppt/slides/slide26.xml><?xml version="1.0" encoding="utf-8"?>
-<p:sld xmlns:a="http://schemas.openxmlformats.org/drawingml/2006/main" xmlns:p="http://schemas.openxmlformats.org/presentationml/2006/main" xmlns:r="http://schemas.openxmlformats.org/officeDocument/2006/relationships">
-  <p:cSld>
-    <p:spTree>
-      <p:nvGrpSpPr>
-        <p:cNvPr id="1" name=""/>
-        <p:cNvGrpSpPr/>
-        <p:nvPr/>
-      </p:nvGrpSpPr>
-      <p:grpSpPr/>
-      <p:sp>
-        <p:nvSpPr>
-          <p:cNvPr id="2" name="Title 1"/>
-          <p:cNvSpPr>
-            <a:spLocks noGrp="1"/>
-          </p:cNvSpPr>
-          <p:nvPr>
-            <p:ph type="title"/>
-          </p:nvPr>
-        </p:nvSpPr>
-        <p:spPr/>
-        <p:txBody>
-          <a:bodyPr/>
-          <a:lstStyle/>
-          <a:p>
-            <a:r>
               <a:t>Summary &amp; Closing</a:t>
             </a:r>
           </a:p>
@@ -4715,6 +4343,30 @@
               <a:t>Format: Whole Class</a:t>
             </a:r>
           </a:p>
+          <a:p>
+            <a:pPr lvl="1"/>
+            <a:r>
+              <a:t>Format: Full group,each</a:t>
+            </a:r>
+          </a:p>
+          <a:p>
+            <a:pPr lvl="1"/>
+            <a:r>
+              <a:t>Bloom’s: Analyze + Evaluate Delivery: Students…</a:t>
+            </a:r>
+          </a:p>
+          <a:p>
+            <a:pPr lvl="1"/>
+            <a:r>
+              <a:t>What data did you find? What…</a:t>
+            </a:r>
+          </a:p>
+          <a:p>
+            <a:pPr lvl="1"/>
+            <a:r>
+              <a:t>35 min WORKS for this cohort…</a:t>
+            </a:r>
+          </a:p>
         </p:txBody>
       </p:sp>
     </p:spTree>
@@ -4751,7 +4403,7 @@
           <a:lstStyle/>
           <a:p>
             <a:r>
-              <a:t>Activity: Format: Full group,each.</a:t>
+              <a:t>Activity: Benchmarking &amp; Context</a:t>
             </a:r>
           </a:p>
         </p:txBody>
@@ -4772,30 +4424,36 @@
           <a:lstStyle/>
           <a:p>
             <a:r>
-              <a:t>Duration: 2 min</a:t>
-            </a:r>
-          </a:p>
-          <a:p>
-            <a:r>
-              <a:t>Format: Group Work</a:t>
-            </a:r>
-          </a:p>
-          <a:p>
-            <a:pPr lvl="1"/>
-            <a:r>
-              <a:t>Bloom’s: Analyze + Evaluate Delivery: Students…</a:t>
-            </a:r>
-          </a:p>
-          <a:p>
-            <a:pPr lvl="1"/>
-            <a:r>
-              <a:t>What data did you find? What…</a:t>
-            </a:r>
-          </a:p>
-          <a:p>
-            <a:pPr lvl="1"/>
-            <a:r>
-              <a:t>35 min WORKS for this cohort…</a:t>
+              <a:t>Duration: 30 min</a:t>
+            </a:r>
+          </a:p>
+          <a:p>
+            <a:r>
+              <a:t>Format: Whole Class</a:t>
+            </a:r>
+          </a:p>
+          <a:p>
+            <a:pPr lvl="1"/>
+            <a:r>
+              <a:t>Delivery: A number means nothing without…</a:t>
+            </a:r>
+          </a:p>
+          <a:p>
+            <a:pPr lvl="1"/>
+            <a:r>
+              <a:t>Benchmarking (vs</a:t>
+            </a:r>
+          </a:p>
+          <a:p>
+            <a:pPr lvl="1"/>
+            <a:r>
+              <a:t>industry/historical averages), trending (getting better or…</a:t>
+            </a:r>
+          </a:p>
+          <a:p>
+            <a:pPr lvl="1"/>
+            <a:r>
+              <a:t>Students add context to their mid-week…</a:t>
             </a:r>
           </a:p>
         </p:txBody>
@@ -4834,7 +4492,7 @@
           <a:lstStyle/>
           <a:p>
             <a:r>
-              <a:t>Activity: Pacing: 15–18 students ×= 30–. Instructor commentary on patterns = 2–. Keep a visible timer. Students who go overare cut.</a:t>
+              <a:t>Activity: Forecasting for Non-Statisticians</a:t>
             </a:r>
           </a:p>
         </p:txBody>
@@ -4855,12 +4513,36 @@
           <a:lstStyle/>
           <a:p>
             <a:r>
-              <a:t>Duration: 2 min</a:t>
+              <a:t>Duration: 30 min</a:t>
             </a:r>
           </a:p>
           <a:p>
             <a:r>
               <a:t>Format: Whole Class</a:t>
+            </a:r>
+          </a:p>
+          <a:p>
+            <a:pPr lvl="1"/>
+            <a:r>
+              <a:t>Format: Hands-on</a:t>
+            </a:r>
+          </a:p>
+          <a:p>
+            <a:pPr lvl="1"/>
+            <a:r>
+              <a:t>Bloom’s: Apply + Analyze Delivery: 3…</a:t>
+            </a:r>
+          </a:p>
+          <a:p>
+            <a:pPr lvl="1"/>
+            <a:r>
+              <a:t>Students build a 6-month forecast in…</a:t>
+            </a:r>
+          </a:p>
+          <a:p>
+            <a:pPr lvl="1"/>
+            <a:r>
+              <a:t>Provide a template with formulas pre-built…</a:t>
             </a:r>
           </a:p>
         </p:txBody>
@@ -4899,7 +4581,7 @@
           <a:lstStyle/>
           <a:p>
             <a:r>
-              <a:t>Activity: Benchmarking &amp; Context</a:t>
+              <a:t>Activity: Break</a:t>
             </a:r>
           </a:p>
         </p:txBody>
@@ -4920,36 +4602,12 @@
           <a:lstStyle/>
           <a:p>
             <a:r>
-              <a:t>Duration: 30 min</a:t>
+              <a:t>Duration: 15 min</a:t>
             </a:r>
           </a:p>
           <a:p>
             <a:r>
               <a:t>Format: Whole Class</a:t>
-            </a:r>
-          </a:p>
-          <a:p>
-            <a:pPr lvl="1"/>
-            <a:r>
-              <a:t>Delivery: A number means nothing without…</a:t>
-            </a:r>
-          </a:p>
-          <a:p>
-            <a:pPr lvl="1"/>
-            <a:r>
-              <a:t>Benchmarking (vs</a:t>
-            </a:r>
-          </a:p>
-          <a:p>
-            <a:pPr lvl="1"/>
-            <a:r>
-              <a:t>industry/historical averages), trending (getting better or…</a:t>
-            </a:r>
-          </a:p>
-          <a:p>
-            <a:pPr lvl="1"/>
-            <a:r>
-              <a:t>Students add context to their mid-week…</a:t>
             </a:r>
           </a:p>
         </p:txBody>
@@ -4988,7 +4646,7 @@
           <a:lstStyle/>
           <a:p>
             <a:r>
-              <a:t>Activity: Forecasting for Non-Statisticians</a:t>
+              <a:t>Activity: KPI Workshop</a:t>
             </a:r>
           </a:p>
         </p:txBody>
@@ -5020,25 +4678,25 @@
           <a:p>
             <a:pPr lvl="1"/>
             <a:r>
-              <a:t>Format: Hands-on</a:t>
-            </a:r>
-          </a:p>
-          <a:p>
-            <a:pPr lvl="1"/>
-            <a:r>
-              <a:t>Bloom’s: Apply + Analyze Delivery: 3…</a:t>
-            </a:r>
-          </a:p>
-          <a:p>
-            <a:pPr lvl="1"/>
-            <a:r>
-              <a:t>Students build a 6-month forecast in…</a:t>
-            </a:r>
-          </a:p>
-          <a:p>
-            <a:pPr lvl="1"/>
-            <a:r>
-              <a:t>Provide a template with formulas pre-built…</a:t>
+              <a:t>Delivery: Vanity metrics vs</a:t>
+            </a:r>
+          </a:p>
+          <a:p>
+            <a:pPr lvl="1"/>
+            <a:r>
+              <a:t>actionable metrics</a:t>
+            </a:r>
+          </a:p>
+          <a:p>
+            <a:pPr lvl="1"/>
+            <a:r>
+              <a:t>A good KPI: specific, measurable, matters…</a:t>
+            </a:r>
+          </a:p>
+          <a:p>
+            <a:pPr lvl="1"/>
+            <a:r>
+              <a:t>Students define 3 KPIs for a…</a:t>
             </a:r>
           </a:p>
         </p:txBody>
@@ -5077,7 +4735,7 @@
           <a:lstStyle/>
           <a:p>
             <a:r>
-              <a:t>Activity: Pacing: Teach 3 methods =. Guided build using template (trend extrapolation) =. Independent build (scenario modeling) =. Transition =.</a:t>
+              <a:t>Activity: Mock Stakeholder Panel — Round 1  |✆</a:t>
             </a:r>
           </a:p>
         </p:txBody>
@@ -5098,12 +4756,30 @@
           <a:lstStyle/>
           <a:p>
             <a:r>
-              <a:t>Duration: 10 min</a:t>
+              <a:t>Duration: 30 min</a:t>
             </a:r>
           </a:p>
           <a:p>
             <a:r>
               <a:t>Format: Whole Class</a:t>
+            </a:r>
+          </a:p>
+          <a:p>
+            <a:pPr lvl="1"/>
+            <a:r>
+              <a:t>Format: Presentations + adversarial Q&amp;A</a:t>
+            </a:r>
+          </a:p>
+          <a:p>
+            <a:pPr lvl="1"/>
+            <a:r>
+              <a:t>Bloom’s: Create + Evaluate Delivery: 2-minute…</a:t>
+            </a:r>
+          </a:p>
+          <a:p>
+            <a:pPr lvl="1"/>
+            <a:r>
+              <a:t>Panel challenges: “Where did you get…</a:t>
             </a:r>
           </a:p>
         </p:txBody>
